--- a/slides/Online_Grocery_Customer_Journey.pptx
+++ b/slides/Online_Grocery_Customer_Journey.pptx
@@ -7843,7 +7843,7 @@
                 <a:ea typeface="Rubik" pitchFamily="34" charset="-122"/>
                 <a:cs typeface="Rubik" pitchFamily="34" charset="-120"/>
               </a:rPr>
-              <a:t>81.3%</a:t>
+              <a:t>81.2%</a:t>
             </a:r>
             <a:endParaRPr lang="en-US" sz="3200" dirty="0"/>
           </a:p>
